--- a/lectures/lec9.pptx
+++ b/lectures/lec9.pptx
@@ -735,10 +735,10 @@
           </a:ln>
           <a:extLst>
             <a:ext uri="{FAA26D3D-D897-4be2-8F04-BA451C77F1D7}">
-              <ma14:placeholderFlag xmlns:ma14="http://schemas.microsoft.com/office/mac/drawingml/2011/main" xmlns="" val="1"/>
+              <ma14:placeholderFlag xmlns="" xmlns:ma14="http://schemas.microsoft.com/office/mac/drawingml/2011/main" val="1"/>
             </a:ext>
             <a:ext uri="{909E8E84-426E-40dd-AFC4-6F175D3DCCD1}">
-              <a14:hiddenFill xmlns:a14="http://schemas.microsoft.com/office/drawing/2010/main" xmlns="">
+              <a14:hiddenFill xmlns="" xmlns:a14="http://schemas.microsoft.com/office/drawing/2010/main">
                 <a:solidFill>
                   <a:srgbClr val="FFFFFF"/>
                 </a:solidFill>
@@ -913,14 +913,14 @@
           <a:ln/>
           <a:extLst>
             <a:ext uri="{909E8E84-426E-40dd-AFC4-6F175D3DCCD1}">
-              <a14:hiddenFill xmlns:a14="http://schemas.microsoft.com/office/drawing/2010/main" xmlns="">
+              <a14:hiddenFill xmlns="" xmlns:a14="http://schemas.microsoft.com/office/drawing/2010/main">
                 <a:solidFill>
                   <a:srgbClr val="FFFFFF"/>
                 </a:solidFill>
               </a14:hiddenFill>
             </a:ext>
             <a:ext uri="{91240B29-F687-4f45-9708-019B960494DF}">
-              <a14:hiddenLine xmlns:a14="http://schemas.microsoft.com/office/drawing/2010/main" xmlns="" w="9525">
+              <a14:hiddenLine xmlns="" xmlns:a14="http://schemas.microsoft.com/office/drawing/2010/main" w="9525">
                 <a:solidFill>
                   <a:srgbClr val="000000"/>
                 </a:solidFill>
@@ -1141,17 +1141,17 @@
           <a:ln/>
           <a:extLst>
             <a:ext uri="{FAA26D3D-D897-4be2-8F04-BA451C77F1D7}">
-              <ma14:placeholderFlag xmlns="" xmlns:ma14="http://schemas.microsoft.com/office/mac/drawingml/2011/main" val="1"/>
+              <ma14:placeholderFlag xmlns:ma14="http://schemas.microsoft.com/office/mac/drawingml/2011/main" xmlns="" val="1"/>
             </a:ext>
             <a:ext uri="{909E8E84-426E-40dd-AFC4-6F175D3DCCD1}">
-              <a14:hiddenFill xmlns:a14="http://schemas.microsoft.com/office/drawing/2010/main" xmlns="">
+              <a14:hiddenFill xmlns="" xmlns:a14="http://schemas.microsoft.com/office/drawing/2010/main">
                 <a:solidFill>
                   <a:srgbClr val="FFFFFF"/>
                 </a:solidFill>
               </a14:hiddenFill>
             </a:ext>
             <a:ext uri="{91240B29-F687-4f45-9708-019B960494DF}">
-              <a14:hiddenLine xmlns:a14="http://schemas.microsoft.com/office/drawing/2010/main" xmlns="" w="9525">
+              <a14:hiddenLine xmlns="" xmlns:a14="http://schemas.microsoft.com/office/drawing/2010/main" w="9525">
                 <a:solidFill>
                   <a:srgbClr val="000000"/>
                 </a:solidFill>
@@ -1568,14 +1568,14 @@
           <a:ln/>
           <a:extLst>
             <a:ext uri="{909E8E84-426E-40dd-AFC4-6F175D3DCCD1}">
-              <a14:hiddenFill xmlns:a14="http://schemas.microsoft.com/office/drawing/2010/main" xmlns="">
+              <a14:hiddenFill xmlns="" xmlns:a14="http://schemas.microsoft.com/office/drawing/2010/main">
                 <a:solidFill>
                   <a:srgbClr val="FFFFFF"/>
                 </a:solidFill>
               </a14:hiddenFill>
             </a:ext>
             <a:ext uri="{91240B29-F687-4f45-9708-019B960494DF}">
-              <a14:hiddenLine xmlns:a14="http://schemas.microsoft.com/office/drawing/2010/main" xmlns="" w="9525">
+              <a14:hiddenLine xmlns="" xmlns:a14="http://schemas.microsoft.com/office/drawing/2010/main" w="9525">
                 <a:solidFill>
                   <a:srgbClr val="000000"/>
                 </a:solidFill>
@@ -1753,7 +1753,7 @@
           </a:ln>
           <a:extLst>
             <a:ext uri="{FAA26D3D-D897-4be2-8F04-BA451C77F1D7}">
-              <ma14:placeholderFlag xmlns:ma14="http://schemas.microsoft.com/office/mac/drawingml/2011/main" xmlns="" val="1"/>
+              <ma14:placeholderFlag xmlns="" xmlns:ma14="http://schemas.microsoft.com/office/mac/drawingml/2011/main" val="1"/>
             </a:ext>
           </a:extLst>
         </p:spPr>
@@ -5185,17 +5185,17 @@
           </a:ln>
           <a:extLst>
             <a:ext uri="{FAA26D3D-D897-4be2-8F04-BA451C77F1D7}">
-              <ma14:placeholderFlag xmlns:ma14="http://schemas.microsoft.com/office/mac/drawingml/2011/main" xmlns="" val="1"/>
+              <ma14:placeholderFlag xmlns="" xmlns:ma14="http://schemas.microsoft.com/office/mac/drawingml/2011/main" val="1"/>
             </a:ext>
             <a:ext uri="{909E8E84-426E-40dd-AFC4-6F175D3DCCD1}">
-              <a14:hiddenFill xmlns="" xmlns:a14="http://schemas.microsoft.com/office/drawing/2010/main">
+              <a14:hiddenFill xmlns:a14="http://schemas.microsoft.com/office/drawing/2010/main" xmlns="">
                 <a:solidFill>
                   <a:srgbClr val="FFFFFF"/>
                 </a:solidFill>
               </a14:hiddenFill>
             </a:ext>
             <a:ext uri="{91240B29-F687-4f45-9708-019B960494DF}">
-              <a14:hiddenLine xmlns="" xmlns:a14="http://schemas.microsoft.com/office/drawing/2010/main" w="9525">
+              <a14:hiddenLine xmlns:a14="http://schemas.microsoft.com/office/drawing/2010/main" xmlns="" w="9525">
                 <a:solidFill>
                   <a:srgbClr val="000000"/>
                 </a:solidFill>
@@ -19163,7 +19163,7 @@
           </a:ln>
           <a:extLst>
             <a:ext uri="{909E8E84-426E-40dd-AFC4-6F175D3DCCD1}">
-              <a14:hiddenFill xmlns:a14="http://schemas.microsoft.com/office/drawing/2010/main" xmlns="">
+              <a14:hiddenFill xmlns="" xmlns:a14="http://schemas.microsoft.com/office/drawing/2010/main">
                 <a:solidFill>
                   <a:srgbClr val="FFFFFF"/>
                 </a:solidFill>
@@ -19206,7 +19206,7 @@
           </a:ln>
           <a:extLst>
             <a:ext uri="{909E8E84-426E-40dd-AFC4-6F175D3DCCD1}">
-              <a14:hiddenFill xmlns:a14="http://schemas.microsoft.com/office/drawing/2010/main" xmlns="">
+              <a14:hiddenFill xmlns="" xmlns:a14="http://schemas.microsoft.com/office/drawing/2010/main">
                 <a:noFill/>
               </a14:hiddenFill>
             </a:ext>
@@ -19242,14 +19242,14 @@
           </a:ln>
           <a:extLst>
             <a:ext uri="{909E8E84-426E-40dd-AFC4-6F175D3DCCD1}">
-              <a14:hiddenFill xmlns:a14="http://schemas.microsoft.com/office/drawing/2010/main" xmlns="">
+              <a14:hiddenFill xmlns="" xmlns:a14="http://schemas.microsoft.com/office/drawing/2010/main">
                 <a:solidFill>
                   <a:srgbClr val="FFFFFF"/>
                 </a:solidFill>
               </a14:hiddenFill>
             </a:ext>
             <a:ext uri="{91240B29-F687-4f45-9708-019B960494DF}">
-              <a14:hiddenLine xmlns:a14="http://schemas.microsoft.com/office/drawing/2010/main" xmlns="" w="9525">
+              <a14:hiddenLine xmlns="" xmlns:a14="http://schemas.microsoft.com/office/drawing/2010/main" w="9525">
                 <a:solidFill>
                   <a:srgbClr val="000000"/>
                 </a:solidFill>
@@ -19475,7 +19475,7 @@
           </a:ln>
           <a:extLst>
             <a:ext uri="{909E8E84-426E-40dd-AFC4-6F175D3DCCD1}">
-              <a14:hiddenFill xmlns:a14="http://schemas.microsoft.com/office/drawing/2010/main" xmlns="">
+              <a14:hiddenFill xmlns="" xmlns:a14="http://schemas.microsoft.com/office/drawing/2010/main">
                 <a:solidFill>
                   <a:srgbClr val="FFFFFF"/>
                 </a:solidFill>
@@ -19513,14 +19513,14 @@
           </a:ln>
           <a:extLst>
             <a:ext uri="{909E8E84-426E-40dd-AFC4-6F175D3DCCD1}">
-              <a14:hiddenFill xmlns:a14="http://schemas.microsoft.com/office/drawing/2010/main" xmlns="">
+              <a14:hiddenFill xmlns="" xmlns:a14="http://schemas.microsoft.com/office/drawing/2010/main">
                 <a:solidFill>
                   <a:srgbClr val="FFFFFF"/>
                 </a:solidFill>
               </a14:hiddenFill>
             </a:ext>
             <a:ext uri="{91240B29-F687-4f45-9708-019B960494DF}">
-              <a14:hiddenLine xmlns:a14="http://schemas.microsoft.com/office/drawing/2010/main" xmlns="" w="9525">
+              <a14:hiddenLine xmlns="" xmlns:a14="http://schemas.microsoft.com/office/drawing/2010/main" w="9525">
                 <a:solidFill>
                   <a:srgbClr val="000000"/>
                 </a:solidFill>
@@ -19676,14 +19676,14 @@
           </a:ln>
           <a:extLst>
             <a:ext uri="{909E8E84-426E-40dd-AFC4-6F175D3DCCD1}">
-              <a14:hiddenFill xmlns:a14="http://schemas.microsoft.com/office/drawing/2010/main" xmlns="">
+              <a14:hiddenFill xmlns="" xmlns:a14="http://schemas.microsoft.com/office/drawing/2010/main">
                 <a:solidFill>
                   <a:srgbClr val="FFFFFF"/>
                 </a:solidFill>
               </a14:hiddenFill>
             </a:ext>
             <a:ext uri="{91240B29-F687-4f45-9708-019B960494DF}">
-              <a14:hiddenLine xmlns:a14="http://schemas.microsoft.com/office/drawing/2010/main" xmlns="" w="9525">
+              <a14:hiddenLine xmlns="" xmlns:a14="http://schemas.microsoft.com/office/drawing/2010/main" w="9525">
                 <a:solidFill>
                   <a:srgbClr val="000000"/>
                 </a:solidFill>
@@ -19885,7 +19885,7 @@
           </a:ln>
           <a:extLst>
             <a:ext uri="{909E8E84-426E-40dd-AFC4-6F175D3DCCD1}">
-              <a14:hiddenFill xmlns:a14="http://schemas.microsoft.com/office/drawing/2010/main" xmlns="">
+              <a14:hiddenFill xmlns="" xmlns:a14="http://schemas.microsoft.com/office/drawing/2010/main">
                 <a:solidFill>
                   <a:srgbClr val="FFFFFF"/>
                 </a:solidFill>
@@ -19969,7 +19969,7 @@
           </a:ln>
           <a:extLst>
             <a:ext uri="{909E8E84-426E-40dd-AFC4-6F175D3DCCD1}">
-              <a14:hiddenFill xmlns:a14="http://schemas.microsoft.com/office/drawing/2010/main" xmlns="">
+              <a14:hiddenFill xmlns="" xmlns:a14="http://schemas.microsoft.com/office/drawing/2010/main">
                 <a:solidFill>
                   <a:srgbClr val="FFFFFF"/>
                 </a:solidFill>
@@ -20053,7 +20053,7 @@
           </a:ln>
           <a:extLst>
             <a:ext uri="{909E8E84-426E-40dd-AFC4-6F175D3DCCD1}">
-              <a14:hiddenFill xmlns:a14="http://schemas.microsoft.com/office/drawing/2010/main" xmlns="">
+              <a14:hiddenFill xmlns="" xmlns:a14="http://schemas.microsoft.com/office/drawing/2010/main">
                 <a:solidFill>
                   <a:srgbClr val="FFFFFF"/>
                 </a:solidFill>
@@ -20096,7 +20096,7 @@
           </a:ln>
           <a:extLst>
             <a:ext uri="{909E8E84-426E-40dd-AFC4-6F175D3DCCD1}">
-              <a14:hiddenFill xmlns:a14="http://schemas.microsoft.com/office/drawing/2010/main" xmlns="">
+              <a14:hiddenFill xmlns="" xmlns:a14="http://schemas.microsoft.com/office/drawing/2010/main">
                 <a:noFill/>
               </a14:hiddenFill>
             </a:ext>
@@ -20137,7 +20137,7 @@
           </a:ln>
           <a:extLst>
             <a:ext uri="{909E8E84-426E-40dd-AFC4-6F175D3DCCD1}">
-              <a14:hiddenFill xmlns:a14="http://schemas.microsoft.com/office/drawing/2010/main" xmlns="">
+              <a14:hiddenFill xmlns="" xmlns:a14="http://schemas.microsoft.com/office/drawing/2010/main">
                 <a:noFill/>
               </a14:hiddenFill>
             </a:ext>
@@ -20178,7 +20178,7 @@
           </a:ln>
           <a:extLst>
             <a:ext uri="{909E8E84-426E-40dd-AFC4-6F175D3DCCD1}">
-              <a14:hiddenFill xmlns:a14="http://schemas.microsoft.com/office/drawing/2010/main" xmlns="">
+              <a14:hiddenFill xmlns="" xmlns:a14="http://schemas.microsoft.com/office/drawing/2010/main">
                 <a:noFill/>
               </a14:hiddenFill>
             </a:ext>
@@ -20221,7 +20221,7 @@
           </a:ln>
           <a:extLst>
             <a:ext uri="{909E8E84-426E-40dd-AFC4-6F175D3DCCD1}">
-              <a14:hiddenFill xmlns:a14="http://schemas.microsoft.com/office/drawing/2010/main" xmlns="">
+              <a14:hiddenFill xmlns="" xmlns:a14="http://schemas.microsoft.com/office/drawing/2010/main">
                 <a:noFill/>
               </a14:hiddenFill>
             </a:ext>
@@ -20256,7 +20256,7 @@
           </a:ln>
           <a:extLst>
             <a:ext uri="{909E8E84-426E-40dd-AFC4-6F175D3DCCD1}">
-              <a14:hiddenFill xmlns:a14="http://schemas.microsoft.com/office/drawing/2010/main" xmlns="">
+              <a14:hiddenFill xmlns="" xmlns:a14="http://schemas.microsoft.com/office/drawing/2010/main">
                 <a:noFill/>
               </a14:hiddenFill>
             </a:ext>
@@ -20292,7 +20292,7 @@
           </a:ln>
           <a:extLst>
             <a:ext uri="{909E8E84-426E-40dd-AFC4-6F175D3DCCD1}">
-              <a14:hiddenFill xmlns:a14="http://schemas.microsoft.com/office/drawing/2010/main" xmlns="">
+              <a14:hiddenFill xmlns="" xmlns:a14="http://schemas.microsoft.com/office/drawing/2010/main">
                 <a:noFill/>
               </a14:hiddenFill>
             </a:ext>
@@ -20327,7 +20327,7 @@
           </a:ln>
           <a:extLst>
             <a:ext uri="{909E8E84-426E-40dd-AFC4-6F175D3DCCD1}">
-              <a14:hiddenFill xmlns:a14="http://schemas.microsoft.com/office/drawing/2010/main" xmlns="">
+              <a14:hiddenFill xmlns="" xmlns:a14="http://schemas.microsoft.com/office/drawing/2010/main">
                 <a:noFill/>
               </a14:hiddenFill>
             </a:ext>
@@ -20377,7 +20377,7 @@
             </a:ln>
             <a:extLst>
               <a:ext uri="{909E8E84-426E-40dd-AFC4-6F175D3DCCD1}">
-                <a14:hiddenFill xmlns:a14="http://schemas.microsoft.com/office/drawing/2010/main" xmlns="">
+                <a14:hiddenFill xmlns="" xmlns:a14="http://schemas.microsoft.com/office/drawing/2010/main">
                   <a:solidFill>
                     <a:srgbClr val="FFFFFF"/>
                   </a:solidFill>
@@ -20422,7 +20422,7 @@
             </a:ln>
             <a:extLst>
               <a:ext uri="{909E8E84-426E-40dd-AFC4-6F175D3DCCD1}">
-                <a14:hiddenFill xmlns:a14="http://schemas.microsoft.com/office/drawing/2010/main" xmlns="">
+                <a14:hiddenFill xmlns="" xmlns:a14="http://schemas.microsoft.com/office/drawing/2010/main">
                   <a:noFill/>
                 </a14:hiddenFill>
               </a:ext>
@@ -20567,7 +20567,7 @@
               </a:ln>
               <a:extLst>
                 <a:ext uri="{909E8E84-426E-40dd-AFC4-6F175D3DCCD1}">
-                  <a14:hiddenFill xmlns:a14="http://schemas.microsoft.com/office/drawing/2010/main" xmlns="">
+                  <a14:hiddenFill xmlns="" xmlns:a14="http://schemas.microsoft.com/office/drawing/2010/main">
                     <a:solidFill>
                       <a:srgbClr val="FFFFFF"/>
                     </a:solidFill>
@@ -20669,7 +20669,7 @@
               </a:ln>
               <a:extLst>
                 <a:ext uri="{909E8E84-426E-40dd-AFC4-6F175D3DCCD1}">
-                  <a14:hiddenFill xmlns:a14="http://schemas.microsoft.com/office/drawing/2010/main" xmlns="">
+                  <a14:hiddenFill xmlns="" xmlns:a14="http://schemas.microsoft.com/office/drawing/2010/main">
                     <a:solidFill>
                       <a:srgbClr val="FFFFFF"/>
                     </a:solidFill>
@@ -20771,7 +20771,7 @@
               </a:ln>
               <a:extLst>
                 <a:ext uri="{909E8E84-426E-40dd-AFC4-6F175D3DCCD1}">
-                  <a14:hiddenFill xmlns:a14="http://schemas.microsoft.com/office/drawing/2010/main" xmlns="">
+                  <a14:hiddenFill xmlns="" xmlns:a14="http://schemas.microsoft.com/office/drawing/2010/main">
                     <a:solidFill>
                       <a:srgbClr val="FFFFFF"/>
                     </a:solidFill>
@@ -20873,7 +20873,7 @@
               </a:ln>
               <a:extLst>
                 <a:ext uri="{909E8E84-426E-40dd-AFC4-6F175D3DCCD1}">
-                  <a14:hiddenFill xmlns:a14="http://schemas.microsoft.com/office/drawing/2010/main" xmlns="">
+                  <a14:hiddenFill xmlns="" xmlns:a14="http://schemas.microsoft.com/office/drawing/2010/main">
                     <a:solidFill>
                       <a:srgbClr val="FFFFFF"/>
                     </a:solidFill>
@@ -20911,14 +20911,14 @@
               </a:ln>
               <a:extLst>
                 <a:ext uri="{909E8E84-426E-40dd-AFC4-6F175D3DCCD1}">
-                  <a14:hiddenFill xmlns:a14="http://schemas.microsoft.com/office/drawing/2010/main" xmlns="">
+                  <a14:hiddenFill xmlns="" xmlns:a14="http://schemas.microsoft.com/office/drawing/2010/main">
                     <a:solidFill>
                       <a:srgbClr val="FFFFFF"/>
                     </a:solidFill>
                   </a14:hiddenFill>
                 </a:ext>
                 <a:ext uri="{91240B29-F687-4f45-9708-019B960494DF}">
-                  <a14:hiddenLine xmlns:a14="http://schemas.microsoft.com/office/drawing/2010/main" xmlns="" w="9525">
+                  <a14:hiddenLine xmlns="" xmlns:a14="http://schemas.microsoft.com/office/drawing/2010/main" w="9525">
                     <a:solidFill>
                       <a:srgbClr val="000000"/>
                     </a:solidFill>
@@ -21072,14 +21072,14 @@
               </a:ln>
               <a:extLst>
                 <a:ext uri="{909E8E84-426E-40dd-AFC4-6F175D3DCCD1}">
-                  <a14:hiddenFill xmlns:a14="http://schemas.microsoft.com/office/drawing/2010/main" xmlns="">
+                  <a14:hiddenFill xmlns="" xmlns:a14="http://schemas.microsoft.com/office/drawing/2010/main">
                     <a:solidFill>
                       <a:srgbClr val="FFFFFF"/>
                     </a:solidFill>
                   </a14:hiddenFill>
                 </a:ext>
                 <a:ext uri="{91240B29-F687-4f45-9708-019B960494DF}">
-                  <a14:hiddenLine xmlns:a14="http://schemas.microsoft.com/office/drawing/2010/main" xmlns="" w="9525">
+                  <a14:hiddenLine xmlns="" xmlns:a14="http://schemas.microsoft.com/office/drawing/2010/main" w="9525">
                     <a:solidFill>
                       <a:srgbClr val="000000"/>
                     </a:solidFill>
@@ -21241,7 +21241,7 @@
               </a:ln>
               <a:extLst>
                 <a:ext uri="{909E8E84-426E-40dd-AFC4-6F175D3DCCD1}">
-                  <a14:hiddenFill xmlns:a14="http://schemas.microsoft.com/office/drawing/2010/main" xmlns="">
+                  <a14:hiddenFill xmlns="" xmlns:a14="http://schemas.microsoft.com/office/drawing/2010/main">
                     <a:noFill/>
                   </a14:hiddenFill>
                 </a:ext>
@@ -21275,7 +21275,7 @@
               </a:ln>
               <a:extLst>
                 <a:ext uri="{909E8E84-426E-40dd-AFC4-6F175D3DCCD1}">
-                  <a14:hiddenFill xmlns:a14="http://schemas.microsoft.com/office/drawing/2010/main" xmlns="">
+                  <a14:hiddenFill xmlns="" xmlns:a14="http://schemas.microsoft.com/office/drawing/2010/main">
                     <a:noFill/>
                   </a14:hiddenFill>
                 </a:ext>
@@ -21343,14 +21343,14 @@
                       <a:effectLst/>
                       <a:extLst>
                         <a:ext uri="{909E8E84-426E-40dd-AFC4-6F175D3DCCD1}">
-                          <a14:hiddenFill xmlns:a14="http://schemas.microsoft.com/office/drawing/2010/main" xmlns="">
+                          <a14:hiddenFill xmlns="" xmlns:a14="http://schemas.microsoft.com/office/drawing/2010/main">
                             <a:solidFill>
                               <a:srgbClr val="FFFFFF"/>
                             </a:solidFill>
                           </a14:hiddenFill>
                         </a:ext>
                         <a:ext uri="{91240B29-F687-4f45-9708-019B960494DF}">
-                          <a14:hiddenLine xmlns:a14="http://schemas.microsoft.com/office/drawing/2010/main" xmlns="" w="9525">
+                          <a14:hiddenLine xmlns="" xmlns:a14="http://schemas.microsoft.com/office/drawing/2010/main" w="9525">
                             <a:solidFill>
                               <a:srgbClr val="000000"/>
                             </a:solidFill>
@@ -21360,7 +21360,7 @@
                           </a14:hiddenLine>
                         </a:ext>
                         <a:ext uri="{AF507438-7753-43e0-B8FC-AC1667EBCBE1}">
-                          <a14:hiddenEffects xmlns:a14="http://schemas.microsoft.com/office/drawing/2010/main" xmlns="">
+                          <a14:hiddenEffects xmlns="" xmlns:a14="http://schemas.microsoft.com/office/drawing/2010/main">
                             <a:effectLst>
                               <a:outerShdw blurRad="63500" dist="38099" dir="2700000" algn="ctr" rotWithShape="0">
                                 <a:srgbClr val="000000">
@@ -21438,14 +21438,14 @@
                       <a:effectLst/>
                       <a:extLst>
                         <a:ext uri="{909E8E84-426E-40dd-AFC4-6F175D3DCCD1}">
-                          <a14:hiddenFill xmlns:a14="http://schemas.microsoft.com/office/drawing/2010/main" xmlns="">
+                          <a14:hiddenFill xmlns="" xmlns:a14="http://schemas.microsoft.com/office/drawing/2010/main">
                             <a:solidFill>
                               <a:srgbClr val="FFFFFF"/>
                             </a:solidFill>
                           </a14:hiddenFill>
                         </a:ext>
                         <a:ext uri="{91240B29-F687-4f45-9708-019B960494DF}">
-                          <a14:hiddenLine xmlns:a14="http://schemas.microsoft.com/office/drawing/2010/main" xmlns="" w="9525">
+                          <a14:hiddenLine xmlns="" xmlns:a14="http://schemas.microsoft.com/office/drawing/2010/main" w="9525">
                             <a:solidFill>
                               <a:srgbClr val="000000"/>
                             </a:solidFill>
@@ -21455,7 +21455,7 @@
                           </a14:hiddenLine>
                         </a:ext>
                         <a:ext uri="{AF507438-7753-43e0-B8FC-AC1667EBCBE1}">
-                          <a14:hiddenEffects xmlns:a14="http://schemas.microsoft.com/office/drawing/2010/main" xmlns="">
+                          <a14:hiddenEffects xmlns="" xmlns:a14="http://schemas.microsoft.com/office/drawing/2010/main">
                             <a:effectLst>
                               <a:outerShdw blurRad="63500" dist="38099" dir="2700000" algn="ctr" rotWithShape="0">
                                 <a:srgbClr val="000000">
@@ -22432,7 +22432,7 @@
           </a:ln>
           <a:extLst>
             <a:ext uri="{909E8E84-426E-40dd-AFC4-6F175D3DCCD1}">
-              <a14:hiddenFill xmlns:a14="http://schemas.microsoft.com/office/drawing/2010/main" xmlns="">
+              <a14:hiddenFill xmlns="" xmlns:a14="http://schemas.microsoft.com/office/drawing/2010/main">
                 <a:solidFill>
                   <a:srgbClr val="FFFFFF"/>
                 </a:solidFill>
@@ -22475,7 +22475,7 @@
           </a:ln>
           <a:extLst>
             <a:ext uri="{909E8E84-426E-40dd-AFC4-6F175D3DCCD1}">
-              <a14:hiddenFill xmlns:a14="http://schemas.microsoft.com/office/drawing/2010/main" xmlns="">
+              <a14:hiddenFill xmlns="" xmlns:a14="http://schemas.microsoft.com/office/drawing/2010/main">
                 <a:noFill/>
               </a14:hiddenFill>
             </a:ext>
@@ -22511,14 +22511,14 @@
           </a:ln>
           <a:extLst>
             <a:ext uri="{909E8E84-426E-40dd-AFC4-6F175D3DCCD1}">
-              <a14:hiddenFill xmlns:a14="http://schemas.microsoft.com/office/drawing/2010/main" xmlns="">
+              <a14:hiddenFill xmlns="" xmlns:a14="http://schemas.microsoft.com/office/drawing/2010/main">
                 <a:solidFill>
                   <a:srgbClr val="FFFFFF"/>
                 </a:solidFill>
               </a14:hiddenFill>
             </a:ext>
             <a:ext uri="{91240B29-F687-4f45-9708-019B960494DF}">
-              <a14:hiddenLine xmlns:a14="http://schemas.microsoft.com/office/drawing/2010/main" xmlns="" w="9525">
+              <a14:hiddenLine xmlns="" xmlns:a14="http://schemas.microsoft.com/office/drawing/2010/main" w="9525">
                 <a:solidFill>
                   <a:srgbClr val="000000"/>
                 </a:solidFill>
@@ -22744,7 +22744,7 @@
           </a:ln>
           <a:extLst>
             <a:ext uri="{909E8E84-426E-40dd-AFC4-6F175D3DCCD1}">
-              <a14:hiddenFill xmlns:a14="http://schemas.microsoft.com/office/drawing/2010/main" xmlns="">
+              <a14:hiddenFill xmlns="" xmlns:a14="http://schemas.microsoft.com/office/drawing/2010/main">
                 <a:solidFill>
                   <a:srgbClr val="FFFFFF"/>
                 </a:solidFill>
@@ -22782,14 +22782,14 @@
           </a:ln>
           <a:extLst>
             <a:ext uri="{909E8E84-426E-40dd-AFC4-6F175D3DCCD1}">
-              <a14:hiddenFill xmlns:a14="http://schemas.microsoft.com/office/drawing/2010/main" xmlns="">
+              <a14:hiddenFill xmlns="" xmlns:a14="http://schemas.microsoft.com/office/drawing/2010/main">
                 <a:solidFill>
                   <a:srgbClr val="FFFFFF"/>
                 </a:solidFill>
               </a14:hiddenFill>
             </a:ext>
             <a:ext uri="{91240B29-F687-4f45-9708-019B960494DF}">
-              <a14:hiddenLine xmlns:a14="http://schemas.microsoft.com/office/drawing/2010/main" xmlns="" w="9525">
+              <a14:hiddenLine xmlns="" xmlns:a14="http://schemas.microsoft.com/office/drawing/2010/main" w="9525">
                 <a:solidFill>
                   <a:srgbClr val="000000"/>
                 </a:solidFill>
@@ -22945,14 +22945,14 @@
           </a:ln>
           <a:extLst>
             <a:ext uri="{909E8E84-426E-40dd-AFC4-6F175D3DCCD1}">
-              <a14:hiddenFill xmlns:a14="http://schemas.microsoft.com/office/drawing/2010/main" xmlns="">
+              <a14:hiddenFill xmlns="" xmlns:a14="http://schemas.microsoft.com/office/drawing/2010/main">
                 <a:solidFill>
                   <a:srgbClr val="FFFFFF"/>
                 </a:solidFill>
               </a14:hiddenFill>
             </a:ext>
             <a:ext uri="{91240B29-F687-4f45-9708-019B960494DF}">
-              <a14:hiddenLine xmlns:a14="http://schemas.microsoft.com/office/drawing/2010/main" xmlns="" w="9525">
+              <a14:hiddenLine xmlns="" xmlns:a14="http://schemas.microsoft.com/office/drawing/2010/main" w="9525">
                 <a:solidFill>
                   <a:srgbClr val="000000"/>
                 </a:solidFill>
@@ -23157,7 +23157,7 @@
           </a:ln>
           <a:extLst>
             <a:ext uri="{909E8E84-426E-40dd-AFC4-6F175D3DCCD1}">
-              <a14:hiddenFill xmlns:a14="http://schemas.microsoft.com/office/drawing/2010/main" xmlns="">
+              <a14:hiddenFill xmlns="" xmlns:a14="http://schemas.microsoft.com/office/drawing/2010/main">
                 <a:solidFill>
                   <a:srgbClr val="FFFFFF"/>
                 </a:solidFill>
@@ -23241,7 +23241,7 @@
           </a:ln>
           <a:extLst>
             <a:ext uri="{909E8E84-426E-40dd-AFC4-6F175D3DCCD1}">
-              <a14:hiddenFill xmlns:a14="http://schemas.microsoft.com/office/drawing/2010/main" xmlns="">
+              <a14:hiddenFill xmlns="" xmlns:a14="http://schemas.microsoft.com/office/drawing/2010/main">
                 <a:solidFill>
                   <a:srgbClr val="FFFFFF"/>
                 </a:solidFill>
@@ -23325,7 +23325,7 @@
           </a:ln>
           <a:extLst>
             <a:ext uri="{909E8E84-426E-40dd-AFC4-6F175D3DCCD1}">
-              <a14:hiddenFill xmlns:a14="http://schemas.microsoft.com/office/drawing/2010/main" xmlns="">
+              <a14:hiddenFill xmlns="" xmlns:a14="http://schemas.microsoft.com/office/drawing/2010/main">
                 <a:solidFill>
                   <a:srgbClr val="FFFFFF"/>
                 </a:solidFill>
@@ -23368,7 +23368,7 @@
           </a:ln>
           <a:extLst>
             <a:ext uri="{909E8E84-426E-40dd-AFC4-6F175D3DCCD1}">
-              <a14:hiddenFill xmlns:a14="http://schemas.microsoft.com/office/drawing/2010/main" xmlns="">
+              <a14:hiddenFill xmlns="" xmlns:a14="http://schemas.microsoft.com/office/drawing/2010/main">
                 <a:noFill/>
               </a14:hiddenFill>
             </a:ext>
@@ -23409,7 +23409,7 @@
           </a:ln>
           <a:extLst>
             <a:ext uri="{909E8E84-426E-40dd-AFC4-6F175D3DCCD1}">
-              <a14:hiddenFill xmlns:a14="http://schemas.microsoft.com/office/drawing/2010/main" xmlns="">
+              <a14:hiddenFill xmlns="" xmlns:a14="http://schemas.microsoft.com/office/drawing/2010/main">
                 <a:noFill/>
               </a14:hiddenFill>
             </a:ext>
@@ -23450,7 +23450,7 @@
           </a:ln>
           <a:extLst>
             <a:ext uri="{909E8E84-426E-40dd-AFC4-6F175D3DCCD1}">
-              <a14:hiddenFill xmlns:a14="http://schemas.microsoft.com/office/drawing/2010/main" xmlns="">
+              <a14:hiddenFill xmlns="" xmlns:a14="http://schemas.microsoft.com/office/drawing/2010/main">
                 <a:noFill/>
               </a14:hiddenFill>
             </a:ext>
@@ -23493,7 +23493,7 @@
           </a:ln>
           <a:extLst>
             <a:ext uri="{909E8E84-426E-40dd-AFC4-6F175D3DCCD1}">
-              <a14:hiddenFill xmlns:a14="http://schemas.microsoft.com/office/drawing/2010/main" xmlns="">
+              <a14:hiddenFill xmlns="" xmlns:a14="http://schemas.microsoft.com/office/drawing/2010/main">
                 <a:noFill/>
               </a14:hiddenFill>
             </a:ext>
@@ -23528,7 +23528,7 @@
           </a:ln>
           <a:extLst>
             <a:ext uri="{909E8E84-426E-40dd-AFC4-6F175D3DCCD1}">
-              <a14:hiddenFill xmlns:a14="http://schemas.microsoft.com/office/drawing/2010/main" xmlns="">
+              <a14:hiddenFill xmlns="" xmlns:a14="http://schemas.microsoft.com/office/drawing/2010/main">
                 <a:noFill/>
               </a14:hiddenFill>
             </a:ext>
@@ -23564,7 +23564,7 @@
           </a:ln>
           <a:extLst>
             <a:ext uri="{909E8E84-426E-40dd-AFC4-6F175D3DCCD1}">
-              <a14:hiddenFill xmlns:a14="http://schemas.microsoft.com/office/drawing/2010/main" xmlns="">
+              <a14:hiddenFill xmlns="" xmlns:a14="http://schemas.microsoft.com/office/drawing/2010/main">
                 <a:noFill/>
               </a14:hiddenFill>
             </a:ext>
@@ -23599,7 +23599,7 @@
           </a:ln>
           <a:extLst>
             <a:ext uri="{909E8E84-426E-40dd-AFC4-6F175D3DCCD1}">
-              <a14:hiddenFill xmlns:a14="http://schemas.microsoft.com/office/drawing/2010/main" xmlns="">
+              <a14:hiddenFill xmlns="" xmlns:a14="http://schemas.microsoft.com/office/drawing/2010/main">
                 <a:noFill/>
               </a14:hiddenFill>
             </a:ext>
@@ -23665,14 +23665,14 @@
                       <a:effectLst/>
                       <a:extLst>
                         <a:ext uri="{909E8E84-426E-40dd-AFC4-6F175D3DCCD1}">
-                          <a14:hiddenFill xmlns:a14="http://schemas.microsoft.com/office/drawing/2010/main" xmlns="">
+                          <a14:hiddenFill xmlns="" xmlns:a14="http://schemas.microsoft.com/office/drawing/2010/main">
                             <a:solidFill>
                               <a:srgbClr val="FFFFFF"/>
                             </a:solidFill>
                           </a14:hiddenFill>
                         </a:ext>
                         <a:ext uri="{91240B29-F687-4f45-9708-019B960494DF}">
-                          <a14:hiddenLine xmlns:a14="http://schemas.microsoft.com/office/drawing/2010/main" xmlns="" w="9525">
+                          <a14:hiddenLine xmlns="" xmlns:a14="http://schemas.microsoft.com/office/drawing/2010/main" w="9525">
                             <a:solidFill>
                               <a:srgbClr val="000000"/>
                             </a:solidFill>
@@ -23682,7 +23682,7 @@
                           </a14:hiddenLine>
                         </a:ext>
                         <a:ext uri="{AF507438-7753-43e0-B8FC-AC1667EBCBE1}">
-                          <a14:hiddenEffects xmlns:a14="http://schemas.microsoft.com/office/drawing/2010/main" xmlns="">
+                          <a14:hiddenEffects xmlns="" xmlns:a14="http://schemas.microsoft.com/office/drawing/2010/main">
                             <a:effectLst>
                               <a:outerShdw blurRad="63500" dist="38099" dir="2700000" algn="ctr" rotWithShape="0">
                                 <a:srgbClr val="000000">
@@ -23760,14 +23760,14 @@
                       <a:effectLst/>
                       <a:extLst>
                         <a:ext uri="{909E8E84-426E-40dd-AFC4-6F175D3DCCD1}">
-                          <a14:hiddenFill xmlns:a14="http://schemas.microsoft.com/office/drawing/2010/main" xmlns="">
+                          <a14:hiddenFill xmlns="" xmlns:a14="http://schemas.microsoft.com/office/drawing/2010/main">
                             <a:solidFill>
                               <a:srgbClr val="FFFFFF"/>
                             </a:solidFill>
                           </a14:hiddenFill>
                         </a:ext>
                         <a:ext uri="{91240B29-F687-4f45-9708-019B960494DF}">
-                          <a14:hiddenLine xmlns:a14="http://schemas.microsoft.com/office/drawing/2010/main" xmlns="" w="9525">
+                          <a14:hiddenLine xmlns="" xmlns:a14="http://schemas.microsoft.com/office/drawing/2010/main" w="9525">
                             <a:solidFill>
                               <a:srgbClr val="000000"/>
                             </a:solidFill>
@@ -23777,7 +23777,7 @@
                           </a14:hiddenLine>
                         </a:ext>
                         <a:ext uri="{AF507438-7753-43e0-B8FC-AC1667EBCBE1}">
-                          <a14:hiddenEffects xmlns:a14="http://schemas.microsoft.com/office/drawing/2010/main" xmlns="">
+                          <a14:hiddenEffects xmlns="" xmlns:a14="http://schemas.microsoft.com/office/drawing/2010/main">
                             <a:effectLst>
                               <a:outerShdw blurRad="63500" dist="38099" dir="2700000" algn="ctr" rotWithShape="0">
                                 <a:srgbClr val="000000">
@@ -24449,12 +24449,12 @@
             <a:effectLst/>
             <a:extLst>
               <a:ext uri="{909E8E84-426E-40dd-AFC4-6F175D3DCCD1}">
-                <a14:hiddenFill xmlns:a14="http://schemas.microsoft.com/office/drawing/2010/main" xmlns="">
+                <a14:hiddenFill xmlns="" xmlns:a14="http://schemas.microsoft.com/office/drawing/2010/main">
                   <a:noFill/>
                 </a14:hiddenFill>
               </a:ext>
               <a:ext uri="{AF507438-7753-43e0-B8FC-AC1667EBCBE1}">
-                <a14:hiddenEffects xmlns:a14="http://schemas.microsoft.com/office/drawing/2010/main" xmlns="">
+                <a14:hiddenEffects xmlns="" xmlns:a14="http://schemas.microsoft.com/office/drawing/2010/main">
                   <a:effectLst>
                     <a:outerShdw blurRad="63500" dist="38099" dir="2700000" algn="ctr" rotWithShape="0">
                       <a:schemeClr val="bg2">
@@ -24497,14 +24497,14 @@
             <a:effectLst/>
             <a:extLst>
               <a:ext uri="{909E8E84-426E-40dd-AFC4-6F175D3DCCD1}">
-                <a14:hiddenFill xmlns:a14="http://schemas.microsoft.com/office/drawing/2010/main" xmlns="">
+                <a14:hiddenFill xmlns="" xmlns:a14="http://schemas.microsoft.com/office/drawing/2010/main">
                   <a:solidFill>
                     <a:schemeClr val="accent1"/>
                   </a:solidFill>
                 </a14:hiddenFill>
               </a:ext>
               <a:ext uri="{91240B29-F687-4f45-9708-019B960494DF}">
-                <a14:hiddenLine xmlns:a14="http://schemas.microsoft.com/office/drawing/2010/main" xmlns="" w="9525">
+                <a14:hiddenLine xmlns="" xmlns:a14="http://schemas.microsoft.com/office/drawing/2010/main" w="9525">
                   <a:solidFill>
                     <a:schemeClr val="tx1"/>
                   </a:solidFill>
@@ -24514,7 +24514,7 @@
                 </a14:hiddenLine>
               </a:ext>
               <a:ext uri="{AF507438-7753-43e0-B8FC-AC1667EBCBE1}">
-                <a14:hiddenEffects xmlns:a14="http://schemas.microsoft.com/office/drawing/2010/main" xmlns="">
+                <a14:hiddenEffects xmlns="" xmlns:a14="http://schemas.microsoft.com/office/drawing/2010/main">
                   <a:effectLst>
                     <a:outerShdw blurRad="63500" dist="38099" dir="2700000" algn="ctr" rotWithShape="0">
                       <a:schemeClr val="bg2">
@@ -24567,7 +24567,7 @@
             <a:effectLst/>
             <a:extLst>
               <a:ext uri="{AF507438-7753-43e0-B8FC-AC1667EBCBE1}">
-                <a14:hiddenEffects xmlns:a14="http://schemas.microsoft.com/office/drawing/2010/main" xmlns="">
+                <a14:hiddenEffects xmlns="" xmlns:a14="http://schemas.microsoft.com/office/drawing/2010/main">
                   <a:effectLst>
                     <a:outerShdw blurRad="63500" dist="38099" dir="2700000" algn="ctr" rotWithShape="0">
                       <a:schemeClr val="bg2">
@@ -24623,7 +24623,7 @@
             <a:effectLst/>
             <a:extLst>
               <a:ext uri="{AF507438-7753-43e0-B8FC-AC1667EBCBE1}">
-                <a14:hiddenEffects xmlns:a14="http://schemas.microsoft.com/office/drawing/2010/main" xmlns="">
+                <a14:hiddenEffects xmlns="" xmlns:a14="http://schemas.microsoft.com/office/drawing/2010/main">
                   <a:effectLst>
                     <a:outerShdw blurRad="63500" dist="38099" dir="2700000" algn="ctr" rotWithShape="0">
                       <a:schemeClr val="bg2">
@@ -24679,7 +24679,7 @@
             <a:effectLst/>
             <a:extLst>
               <a:ext uri="{AF507438-7753-43e0-B8FC-AC1667EBCBE1}">
-                <a14:hiddenEffects xmlns:a14="http://schemas.microsoft.com/office/drawing/2010/main" xmlns="">
+                <a14:hiddenEffects xmlns="" xmlns:a14="http://schemas.microsoft.com/office/drawing/2010/main">
                   <a:effectLst>
                     <a:outerShdw blurRad="63500" dist="38099" dir="2700000" algn="ctr" rotWithShape="0">
                       <a:schemeClr val="bg2">
@@ -24735,7 +24735,7 @@
             <a:effectLst/>
             <a:extLst>
               <a:ext uri="{AF507438-7753-43e0-B8FC-AC1667EBCBE1}">
-                <a14:hiddenEffects xmlns:a14="http://schemas.microsoft.com/office/drawing/2010/main" xmlns="">
+                <a14:hiddenEffects xmlns="" xmlns:a14="http://schemas.microsoft.com/office/drawing/2010/main">
                   <a:effectLst>
                     <a:outerShdw blurRad="63500" dist="38099" dir="2700000" algn="ctr" rotWithShape="0">
                       <a:schemeClr val="bg2">
@@ -24790,12 +24790,12 @@
             <a:effectLst/>
             <a:extLst>
               <a:ext uri="{909E8E84-426E-40dd-AFC4-6F175D3DCCD1}">
-                <a14:hiddenFill xmlns:a14="http://schemas.microsoft.com/office/drawing/2010/main" xmlns="">
+                <a14:hiddenFill xmlns="" xmlns:a14="http://schemas.microsoft.com/office/drawing/2010/main">
                   <a:noFill/>
                 </a14:hiddenFill>
               </a:ext>
               <a:ext uri="{AF507438-7753-43e0-B8FC-AC1667EBCBE1}">
-                <a14:hiddenEffects xmlns:a14="http://schemas.microsoft.com/office/drawing/2010/main" xmlns="">
+                <a14:hiddenEffects xmlns="" xmlns:a14="http://schemas.microsoft.com/office/drawing/2010/main">
                   <a:effectLst>
                     <a:outerShdw blurRad="63500" dist="38099" dir="2700000" algn="ctr" rotWithShape="0">
                       <a:schemeClr val="bg2">
@@ -24852,14 +24852,14 @@
           <a:effectLst/>
           <a:extLst>
             <a:ext uri="{909E8E84-426E-40dd-AFC4-6F175D3DCCD1}">
-              <a14:hiddenFill xmlns:a14="http://schemas.microsoft.com/office/drawing/2010/main" xmlns="">
+              <a14:hiddenFill xmlns="" xmlns:a14="http://schemas.microsoft.com/office/drawing/2010/main">
                 <a:solidFill>
                   <a:schemeClr val="accent1"/>
                 </a:solidFill>
               </a14:hiddenFill>
             </a:ext>
             <a:ext uri="{91240B29-F687-4f45-9708-019B960494DF}">
-              <a14:hiddenLine xmlns:a14="http://schemas.microsoft.com/office/drawing/2010/main" xmlns="" w="9525">
+              <a14:hiddenLine xmlns="" xmlns:a14="http://schemas.microsoft.com/office/drawing/2010/main" w="9525">
                 <a:solidFill>
                   <a:schemeClr val="tx1"/>
                 </a:solidFill>
@@ -24869,7 +24869,7 @@
               </a14:hiddenLine>
             </a:ext>
             <a:ext uri="{AF507438-7753-43e0-B8FC-AC1667EBCBE1}">
-              <a14:hiddenEffects xmlns:a14="http://schemas.microsoft.com/office/drawing/2010/main" xmlns="">
+              <a14:hiddenEffects xmlns="" xmlns:a14="http://schemas.microsoft.com/office/drawing/2010/main">
                 <a:effectLst>
                   <a:outerShdw blurRad="63500" dist="38099" dir="2700000" algn="ctr" rotWithShape="0">
                     <a:schemeClr val="bg2">
@@ -24918,14 +24918,14 @@
           <a:effectLst/>
           <a:extLst>
             <a:ext uri="{909E8E84-426E-40dd-AFC4-6F175D3DCCD1}">
-              <a14:hiddenFill xmlns:a14="http://schemas.microsoft.com/office/drawing/2010/main" xmlns="">
+              <a14:hiddenFill xmlns="" xmlns:a14="http://schemas.microsoft.com/office/drawing/2010/main">
                 <a:solidFill>
                   <a:schemeClr val="accent1"/>
                 </a:solidFill>
               </a14:hiddenFill>
             </a:ext>
             <a:ext uri="{91240B29-F687-4f45-9708-019B960494DF}">
-              <a14:hiddenLine xmlns:a14="http://schemas.microsoft.com/office/drawing/2010/main" xmlns="" w="9525">
+              <a14:hiddenLine xmlns="" xmlns:a14="http://schemas.microsoft.com/office/drawing/2010/main" w="9525">
                 <a:solidFill>
                   <a:schemeClr val="tx1"/>
                 </a:solidFill>
@@ -24935,7 +24935,7 @@
               </a14:hiddenLine>
             </a:ext>
             <a:ext uri="{AF507438-7753-43e0-B8FC-AC1667EBCBE1}">
-              <a14:hiddenEffects xmlns:a14="http://schemas.microsoft.com/office/drawing/2010/main" xmlns="">
+              <a14:hiddenEffects xmlns="" xmlns:a14="http://schemas.microsoft.com/office/drawing/2010/main">
                 <a:effectLst>
                   <a:outerShdw blurRad="63500" dist="38099" dir="2700000" algn="ctr" rotWithShape="0">
                     <a:schemeClr val="bg2">
@@ -29152,14 +29152,14 @@
           </a:ln>
           <a:extLst>
             <a:ext uri="{909E8E84-426E-40dd-AFC4-6F175D3DCCD1}">
-              <a14:hiddenFill xmlns:a14="http://schemas.microsoft.com/office/drawing/2010/main" xmlns="">
+              <a14:hiddenFill xmlns="" xmlns:a14="http://schemas.microsoft.com/office/drawing/2010/main">
                 <a:solidFill>
                   <a:srgbClr val="FFFFFF"/>
                 </a:solidFill>
               </a14:hiddenFill>
             </a:ext>
             <a:ext uri="{91240B29-F687-4f45-9708-019B960494DF}">
-              <a14:hiddenLine xmlns:a14="http://schemas.microsoft.com/office/drawing/2010/main" xmlns="" w="9525">
+              <a14:hiddenLine xmlns="" xmlns:a14="http://schemas.microsoft.com/office/drawing/2010/main" w="9525">
                 <a:solidFill>
                   <a:srgbClr val="000000"/>
                 </a:solidFill>
@@ -29224,7 +29224,7 @@
             <a:effectLst/>
             <a:extLst>
               <a:ext uri="{AF507438-7753-43e0-B8FC-AC1667EBCBE1}">
-                <a14:hiddenEffects xmlns:a14="http://schemas.microsoft.com/office/drawing/2010/main" xmlns="">
+                <a14:hiddenEffects xmlns="" xmlns:a14="http://schemas.microsoft.com/office/drawing/2010/main">
                   <a:effectLst>
                     <a:outerShdw blurRad="63500" dist="38099" dir="2700000" algn="ctr" rotWithShape="0">
                       <a:schemeClr val="bg2">
@@ -29283,7 +29283,7 @@
             <a:effectLst/>
             <a:extLst>
               <a:ext uri="{AF507438-7753-43e0-B8FC-AC1667EBCBE1}">
-                <a14:hiddenEffects xmlns:a14="http://schemas.microsoft.com/office/drawing/2010/main" xmlns="">
+                <a14:hiddenEffects xmlns="" xmlns:a14="http://schemas.microsoft.com/office/drawing/2010/main">
                   <a:effectLst>
                     <a:outerShdw blurRad="63500" dist="38099" dir="2700000" algn="ctr" rotWithShape="0">
                       <a:schemeClr val="bg2">
@@ -29338,7 +29338,7 @@
             <a:effectLst/>
             <a:extLst>
               <a:ext uri="{AF507438-7753-43e0-B8FC-AC1667EBCBE1}">
-                <a14:hiddenEffects xmlns:a14="http://schemas.microsoft.com/office/drawing/2010/main" xmlns="">
+                <a14:hiddenEffects xmlns="" xmlns:a14="http://schemas.microsoft.com/office/drawing/2010/main">
                   <a:effectLst>
                     <a:outerShdw blurRad="63500" dist="38099" dir="2700000" algn="ctr" rotWithShape="0">
                       <a:schemeClr val="bg2">
@@ -29395,12 +29395,12 @@
             <a:effectLst/>
             <a:extLst>
               <a:ext uri="{909E8E84-426E-40dd-AFC4-6F175D3DCCD1}">
-                <a14:hiddenFill xmlns:a14="http://schemas.microsoft.com/office/drawing/2010/main" xmlns="">
+                <a14:hiddenFill xmlns="" xmlns:a14="http://schemas.microsoft.com/office/drawing/2010/main">
                   <a:noFill/>
                 </a14:hiddenFill>
               </a:ext>
               <a:ext uri="{AF507438-7753-43e0-B8FC-AC1667EBCBE1}">
-                <a14:hiddenEffects xmlns:a14="http://schemas.microsoft.com/office/drawing/2010/main" xmlns="">
+                <a14:hiddenEffects xmlns="" xmlns:a14="http://schemas.microsoft.com/office/drawing/2010/main">
                   <a:effectLst>
                     <a:outerShdw blurRad="63500" dist="38099" dir="2700000" algn="ctr" rotWithShape="0">
                       <a:schemeClr val="bg2">
@@ -29453,12 +29453,12 @@
             <a:effectLst/>
             <a:extLst>
               <a:ext uri="{909E8E84-426E-40dd-AFC4-6F175D3DCCD1}">
-                <a14:hiddenFill xmlns:a14="http://schemas.microsoft.com/office/drawing/2010/main" xmlns="">
+                <a14:hiddenFill xmlns="" xmlns:a14="http://schemas.microsoft.com/office/drawing/2010/main">
                   <a:noFill/>
                 </a14:hiddenFill>
               </a:ext>
               <a:ext uri="{AF507438-7753-43e0-B8FC-AC1667EBCBE1}">
-                <a14:hiddenEffects xmlns:a14="http://schemas.microsoft.com/office/drawing/2010/main" xmlns="">
+                <a14:hiddenEffects xmlns="" xmlns:a14="http://schemas.microsoft.com/office/drawing/2010/main">
                   <a:effectLst>
                     <a:outerShdw blurRad="63500" dist="38099" dir="2700000" algn="ctr" rotWithShape="0">
                       <a:schemeClr val="bg2">
@@ -29506,14 +29506,14 @@
             <a:effectLst/>
             <a:extLst>
               <a:ext uri="{909E8E84-426E-40dd-AFC4-6F175D3DCCD1}">
-                <a14:hiddenFill xmlns:a14="http://schemas.microsoft.com/office/drawing/2010/main" xmlns="">
+                <a14:hiddenFill xmlns="" xmlns:a14="http://schemas.microsoft.com/office/drawing/2010/main">
                   <a:solidFill>
                     <a:schemeClr val="accent1"/>
                   </a:solidFill>
                 </a14:hiddenFill>
               </a:ext>
               <a:ext uri="{91240B29-F687-4f45-9708-019B960494DF}">
-                <a14:hiddenLine xmlns:a14="http://schemas.microsoft.com/office/drawing/2010/main" xmlns="" w="9525">
+                <a14:hiddenLine xmlns="" xmlns:a14="http://schemas.microsoft.com/office/drawing/2010/main" w="9525">
                   <a:solidFill>
                     <a:schemeClr val="tx1"/>
                   </a:solidFill>
@@ -29523,7 +29523,7 @@
                 </a14:hiddenLine>
               </a:ext>
               <a:ext uri="{AF507438-7753-43e0-B8FC-AC1667EBCBE1}">
-                <a14:hiddenEffects xmlns:a14="http://schemas.microsoft.com/office/drawing/2010/main" xmlns="">
+                <a14:hiddenEffects xmlns="" xmlns:a14="http://schemas.microsoft.com/office/drawing/2010/main">
                   <a:effectLst>
                     <a:outerShdw blurRad="63500" dist="38099" dir="2700000" algn="ctr" rotWithShape="0">
                       <a:schemeClr val="bg2">
@@ -29678,14 +29678,14 @@
             <a:effectLst/>
             <a:extLst>
               <a:ext uri="{909E8E84-426E-40dd-AFC4-6F175D3DCCD1}">
-                <a14:hiddenFill xmlns:a14="http://schemas.microsoft.com/office/drawing/2010/main" xmlns="">
+                <a14:hiddenFill xmlns="" xmlns:a14="http://schemas.microsoft.com/office/drawing/2010/main">
                   <a:solidFill>
                     <a:schemeClr val="accent1"/>
                   </a:solidFill>
                 </a14:hiddenFill>
               </a:ext>
               <a:ext uri="{91240B29-F687-4f45-9708-019B960494DF}">
-                <a14:hiddenLine xmlns:a14="http://schemas.microsoft.com/office/drawing/2010/main" xmlns="" w="9525">
+                <a14:hiddenLine xmlns="" xmlns:a14="http://schemas.microsoft.com/office/drawing/2010/main" w="9525">
                   <a:solidFill>
                     <a:schemeClr val="tx1"/>
                   </a:solidFill>
@@ -29695,7 +29695,7 @@
                 </a14:hiddenLine>
               </a:ext>
               <a:ext uri="{AF507438-7753-43e0-B8FC-AC1667EBCBE1}">
-                <a14:hiddenEffects xmlns:a14="http://schemas.microsoft.com/office/drawing/2010/main" xmlns="">
+                <a14:hiddenEffects xmlns="" xmlns:a14="http://schemas.microsoft.com/office/drawing/2010/main">
                   <a:effectLst>
                     <a:outerShdw blurRad="63500" dist="38099" dir="2700000" algn="ctr" rotWithShape="0">
                       <a:schemeClr val="bg2">
@@ -29863,7 +29863,7 @@
             <a:effectLst/>
             <a:extLst>
               <a:ext uri="{AF507438-7753-43e0-B8FC-AC1667EBCBE1}">
-                <a14:hiddenEffects xmlns:a14="http://schemas.microsoft.com/office/drawing/2010/main" xmlns="">
+                <a14:hiddenEffects xmlns="" xmlns:a14="http://schemas.microsoft.com/office/drawing/2010/main">
                   <a:effectLst>
                     <a:outerShdw blurRad="63500" dist="38099" dir="2700000" algn="ctr" rotWithShape="0">
                       <a:schemeClr val="bg2">
@@ -29922,7 +29922,7 @@
             <a:effectLst/>
             <a:extLst>
               <a:ext uri="{AF507438-7753-43e0-B8FC-AC1667EBCBE1}">
-                <a14:hiddenEffects xmlns:a14="http://schemas.microsoft.com/office/drawing/2010/main" xmlns="">
+                <a14:hiddenEffects xmlns="" xmlns:a14="http://schemas.microsoft.com/office/drawing/2010/main">
                   <a:effectLst>
                     <a:outerShdw blurRad="63500" dist="38099" dir="2700000" algn="ctr" rotWithShape="0">
                       <a:schemeClr val="bg2">
@@ -29979,12 +29979,12 @@
             <a:effectLst/>
             <a:extLst>
               <a:ext uri="{909E8E84-426E-40dd-AFC4-6F175D3DCCD1}">
-                <a14:hiddenFill xmlns:a14="http://schemas.microsoft.com/office/drawing/2010/main" xmlns="">
+                <a14:hiddenFill xmlns="" xmlns:a14="http://schemas.microsoft.com/office/drawing/2010/main">
                   <a:noFill/>
                 </a14:hiddenFill>
               </a:ext>
               <a:ext uri="{AF507438-7753-43e0-B8FC-AC1667EBCBE1}">
-                <a14:hiddenEffects xmlns:a14="http://schemas.microsoft.com/office/drawing/2010/main" xmlns="">
+                <a14:hiddenEffects xmlns="" xmlns:a14="http://schemas.microsoft.com/office/drawing/2010/main">
                   <a:effectLst>
                     <a:outerShdw blurRad="63500" dist="38099" dir="2700000" algn="ctr" rotWithShape="0">
                       <a:schemeClr val="bg2">
@@ -30037,12 +30037,12 @@
             <a:effectLst/>
             <a:extLst>
               <a:ext uri="{909E8E84-426E-40dd-AFC4-6F175D3DCCD1}">
-                <a14:hiddenFill xmlns:a14="http://schemas.microsoft.com/office/drawing/2010/main" xmlns="">
+                <a14:hiddenFill xmlns="" xmlns:a14="http://schemas.microsoft.com/office/drawing/2010/main">
                   <a:noFill/>
                 </a14:hiddenFill>
               </a:ext>
               <a:ext uri="{AF507438-7753-43e0-B8FC-AC1667EBCBE1}">
-                <a14:hiddenEffects xmlns:a14="http://schemas.microsoft.com/office/drawing/2010/main" xmlns="">
+                <a14:hiddenEffects xmlns="" xmlns:a14="http://schemas.microsoft.com/office/drawing/2010/main">
                   <a:effectLst>
                     <a:outerShdw blurRad="63500" dist="38099" dir="2700000" algn="ctr" rotWithShape="0">
                       <a:schemeClr val="bg2">
@@ -30090,14 +30090,14 @@
             <a:effectLst/>
             <a:extLst>
               <a:ext uri="{909E8E84-426E-40dd-AFC4-6F175D3DCCD1}">
-                <a14:hiddenFill xmlns:a14="http://schemas.microsoft.com/office/drawing/2010/main" xmlns="">
+                <a14:hiddenFill xmlns="" xmlns:a14="http://schemas.microsoft.com/office/drawing/2010/main">
                   <a:solidFill>
                     <a:schemeClr val="accent1"/>
                   </a:solidFill>
                 </a14:hiddenFill>
               </a:ext>
               <a:ext uri="{91240B29-F687-4f45-9708-019B960494DF}">
-                <a14:hiddenLine xmlns:a14="http://schemas.microsoft.com/office/drawing/2010/main" xmlns="" w="9525">
+                <a14:hiddenLine xmlns="" xmlns:a14="http://schemas.microsoft.com/office/drawing/2010/main" w="9525">
                   <a:solidFill>
                     <a:schemeClr val="tx1"/>
                   </a:solidFill>
@@ -30107,7 +30107,7 @@
                 </a14:hiddenLine>
               </a:ext>
               <a:ext uri="{AF507438-7753-43e0-B8FC-AC1667EBCBE1}">
-                <a14:hiddenEffects xmlns:a14="http://schemas.microsoft.com/office/drawing/2010/main" xmlns="">
+                <a14:hiddenEffects xmlns="" xmlns:a14="http://schemas.microsoft.com/office/drawing/2010/main">
                   <a:effectLst>
                     <a:outerShdw blurRad="63500" dist="38099" dir="2700000" algn="ctr" rotWithShape="0">
                       <a:schemeClr val="bg2">
@@ -30262,14 +30262,14 @@
             <a:effectLst/>
             <a:extLst>
               <a:ext uri="{909E8E84-426E-40dd-AFC4-6F175D3DCCD1}">
-                <a14:hiddenFill xmlns:a14="http://schemas.microsoft.com/office/drawing/2010/main" xmlns="">
+                <a14:hiddenFill xmlns="" xmlns:a14="http://schemas.microsoft.com/office/drawing/2010/main">
                   <a:solidFill>
                     <a:schemeClr val="accent1"/>
                   </a:solidFill>
                 </a14:hiddenFill>
               </a:ext>
               <a:ext uri="{91240B29-F687-4f45-9708-019B960494DF}">
-                <a14:hiddenLine xmlns:a14="http://schemas.microsoft.com/office/drawing/2010/main" xmlns="" w="9525">
+                <a14:hiddenLine xmlns="" xmlns:a14="http://schemas.microsoft.com/office/drawing/2010/main" w="9525">
                   <a:solidFill>
                     <a:schemeClr val="tx1"/>
                   </a:solidFill>
@@ -30279,7 +30279,7 @@
                 </a14:hiddenLine>
               </a:ext>
               <a:ext uri="{AF507438-7753-43e0-B8FC-AC1667EBCBE1}">
-                <a14:hiddenEffects xmlns:a14="http://schemas.microsoft.com/office/drawing/2010/main" xmlns="">
+                <a14:hiddenEffects xmlns="" xmlns:a14="http://schemas.microsoft.com/office/drawing/2010/main">
                   <a:effectLst>
                     <a:outerShdw blurRad="63500" dist="38099" dir="2700000" algn="ctr" rotWithShape="0">
                       <a:schemeClr val="bg2">
@@ -31836,7 +31836,7 @@
                             </p:stCondLst>
                             <p:childTnLst>
                               <p:par>
-                                <p:cTn id="5" presetID="1" presetClass="entr" presetSubtype="0" fill="hold" grpId="0" nodeType="clickEffect">
+                                <p:cTn id="5" presetID="1" presetClass="entr" presetSubtype="0" fill="hold" nodeType="clickEffect">
                                   <p:stCondLst>
                                     <p:cond delay="0"/>
                                   </p:stCondLst>
@@ -31849,11 +31849,7 @@
                                           </p:stCondLst>
                                         </p:cTn>
                                         <p:tgtEl>
-                                          <p:spTgt spid="3">
-                                            <p:txEl>
-                                              <p:pRg st="0" end="0"/>
-                                            </p:txEl>
-                                          </p:spTgt>
+                                          <p:spTgt spid="6"/>
                                         </p:tgtEl>
                                         <p:attrNameLst>
                                           <p:attrName>style.visibility</p:attrName>
@@ -31898,11 +31894,34 @@
                                           </p:stCondLst>
                                         </p:cTn>
                                         <p:tgtEl>
-                                          <p:spTgt spid="3">
-                                            <p:txEl>
-                                              <p:pRg st="1" end="1"/>
-                                            </p:txEl>
-                                          </p:spTgt>
+                                          <p:spTgt spid="15"/>
+                                        </p:tgtEl>
+                                        <p:attrNameLst>
+                                          <p:attrName>style.visibility</p:attrName>
+                                        </p:attrNameLst>
+                                      </p:cBhvr>
+                                      <p:to>
+                                        <p:strVal val="visible"/>
+                                      </p:to>
+                                    </p:set>
+                                  </p:childTnLst>
+                                </p:cTn>
+                              </p:par>
+                              <p:par>
+                                <p:cTn id="11" presetID="1" presetClass="entr" presetSubtype="0" fill="hold" nodeType="withEffect">
+                                  <p:stCondLst>
+                                    <p:cond delay="0"/>
+                                  </p:stCondLst>
+                                  <p:childTnLst>
+                                    <p:set>
+                                      <p:cBhvr>
+                                        <p:cTn id="12" dur="1" fill="hold">
+                                          <p:stCondLst>
+                                            <p:cond delay="0"/>
+                                          </p:stCondLst>
+                                        </p:cTn>
+                                        <p:tgtEl>
+                                          <p:spTgt spid="9"/>
                                         </p:tgtEl>
                                         <p:attrNameLst>
                                           <p:attrName>style.visibility</p:attrName>
@@ -31922,36 +31941,32 @@
                     </p:cTn>
                   </p:par>
                   <p:par>
-                    <p:cTn id="11" fill="hold">
+                    <p:cTn id="13" fill="hold">
                       <p:stCondLst>
                         <p:cond delay="indefinite"/>
                       </p:stCondLst>
                       <p:childTnLst>
                         <p:par>
-                          <p:cTn id="12" fill="hold">
+                          <p:cTn id="14" fill="hold">
                             <p:stCondLst>
                               <p:cond delay="0"/>
                             </p:stCondLst>
                             <p:childTnLst>
                               <p:par>
-                                <p:cTn id="13" presetID="1" presetClass="entr" presetSubtype="0" fill="hold" grpId="0" nodeType="clickEffect">
+                                <p:cTn id="15" presetID="1" presetClass="entr" presetSubtype="0" fill="hold" grpId="0" nodeType="clickEffect">
                                   <p:stCondLst>
                                     <p:cond delay="0"/>
                                   </p:stCondLst>
                                   <p:childTnLst>
                                     <p:set>
                                       <p:cBhvr>
-                                        <p:cTn id="14" dur="1" fill="hold">
+                                        <p:cTn id="16" dur="1" fill="hold">
                                           <p:stCondLst>
                                             <p:cond delay="0"/>
                                           </p:stCondLst>
                                         </p:cTn>
                                         <p:tgtEl>
-                                          <p:spTgt spid="3">
-                                            <p:txEl>
-                                              <p:pRg st="2" end="2"/>
-                                            </p:txEl>
-                                          </p:spTgt>
+                                          <p:spTgt spid="16"/>
                                         </p:tgtEl>
                                         <p:attrNameLst>
                                           <p:attrName>style.visibility</p:attrName>
@@ -31964,26 +31979,8 @@
                                   </p:childTnLst>
                                 </p:cTn>
                               </p:par>
-                            </p:childTnLst>
-                          </p:cTn>
-                        </p:par>
-                      </p:childTnLst>
-                    </p:cTn>
-                  </p:par>
-                  <p:par>
-                    <p:cTn id="15" fill="hold">
-                      <p:stCondLst>
-                        <p:cond delay="indefinite"/>
-                      </p:stCondLst>
-                      <p:childTnLst>
-                        <p:par>
-                          <p:cTn id="16" fill="hold">
-                            <p:stCondLst>
-                              <p:cond delay="0"/>
-                            </p:stCondLst>
-                            <p:childTnLst>
                               <p:par>
-                                <p:cTn id="17" presetID="1" presetClass="entr" presetSubtype="0" fill="hold" grpId="0" nodeType="clickEffect">
+                                <p:cTn id="17" presetID="1" presetClass="entr" presetSubtype="0" fill="hold" nodeType="withEffect">
                                   <p:stCondLst>
                                     <p:cond delay="0"/>
                                   </p:stCondLst>
@@ -31996,11 +31993,7 @@
                                           </p:stCondLst>
                                         </p:cTn>
                                         <p:tgtEl>
-                                          <p:spTgt spid="3">
-                                            <p:txEl>
-                                              <p:pRg st="3" end="3"/>
-                                            </p:txEl>
-                                          </p:spTgt>
+                                          <p:spTgt spid="11"/>
                                         </p:tgtEl>
                                         <p:attrNameLst>
                                           <p:attrName>style.visibility</p:attrName>
@@ -32045,391 +32038,6 @@
                                           </p:stCondLst>
                                         </p:cTn>
                                         <p:tgtEl>
-                                          <p:spTgt spid="3">
-                                            <p:txEl>
-                                              <p:pRg st="4" end="4"/>
-                                            </p:txEl>
-                                          </p:spTgt>
-                                        </p:tgtEl>
-                                        <p:attrNameLst>
-                                          <p:attrName>style.visibility</p:attrName>
-                                        </p:attrNameLst>
-                                      </p:cBhvr>
-                                      <p:to>
-                                        <p:strVal val="visible"/>
-                                      </p:to>
-                                    </p:set>
-                                  </p:childTnLst>
-                                </p:cTn>
-                              </p:par>
-                            </p:childTnLst>
-                          </p:cTn>
-                        </p:par>
-                      </p:childTnLst>
-                    </p:cTn>
-                  </p:par>
-                  <p:par>
-                    <p:cTn id="23" fill="hold">
-                      <p:stCondLst>
-                        <p:cond delay="indefinite"/>
-                      </p:stCondLst>
-                      <p:childTnLst>
-                        <p:par>
-                          <p:cTn id="24" fill="hold">
-                            <p:stCondLst>
-                              <p:cond delay="0"/>
-                            </p:stCondLst>
-                            <p:childTnLst>
-                              <p:par>
-                                <p:cTn id="25" presetID="1" presetClass="entr" presetSubtype="0" fill="hold" grpId="0" nodeType="clickEffect">
-                                  <p:stCondLst>
-                                    <p:cond delay="0"/>
-                                  </p:stCondLst>
-                                  <p:childTnLst>
-                                    <p:set>
-                                      <p:cBhvr>
-                                        <p:cTn id="26" dur="1" fill="hold">
-                                          <p:stCondLst>
-                                            <p:cond delay="0"/>
-                                          </p:stCondLst>
-                                        </p:cTn>
-                                        <p:tgtEl>
-                                          <p:spTgt spid="3">
-                                            <p:txEl>
-                                              <p:pRg st="5" end="5"/>
-                                            </p:txEl>
-                                          </p:spTgt>
-                                        </p:tgtEl>
-                                        <p:attrNameLst>
-                                          <p:attrName>style.visibility</p:attrName>
-                                        </p:attrNameLst>
-                                      </p:cBhvr>
-                                      <p:to>
-                                        <p:strVal val="visible"/>
-                                      </p:to>
-                                    </p:set>
-                                  </p:childTnLst>
-                                </p:cTn>
-                              </p:par>
-                            </p:childTnLst>
-                          </p:cTn>
-                        </p:par>
-                      </p:childTnLst>
-                    </p:cTn>
-                  </p:par>
-                  <p:par>
-                    <p:cTn id="27" fill="hold">
-                      <p:stCondLst>
-                        <p:cond delay="indefinite"/>
-                      </p:stCondLst>
-                      <p:childTnLst>
-                        <p:par>
-                          <p:cTn id="28" fill="hold">
-                            <p:stCondLst>
-                              <p:cond delay="0"/>
-                            </p:stCondLst>
-                            <p:childTnLst>
-                              <p:par>
-                                <p:cTn id="29" presetID="1" presetClass="entr" presetSubtype="0" fill="hold" grpId="0" nodeType="clickEffect">
-                                  <p:stCondLst>
-                                    <p:cond delay="0"/>
-                                  </p:stCondLst>
-                                  <p:childTnLst>
-                                    <p:set>
-                                      <p:cBhvr>
-                                        <p:cTn id="30" dur="1" fill="hold">
-                                          <p:stCondLst>
-                                            <p:cond delay="0"/>
-                                          </p:stCondLst>
-                                        </p:cTn>
-                                        <p:tgtEl>
-                                          <p:spTgt spid="3">
-                                            <p:txEl>
-                                              <p:pRg st="6" end="6"/>
-                                            </p:txEl>
-                                          </p:spTgt>
-                                        </p:tgtEl>
-                                        <p:attrNameLst>
-                                          <p:attrName>style.visibility</p:attrName>
-                                        </p:attrNameLst>
-                                      </p:cBhvr>
-                                      <p:to>
-                                        <p:strVal val="visible"/>
-                                      </p:to>
-                                    </p:set>
-                                  </p:childTnLst>
-                                </p:cTn>
-                              </p:par>
-                            </p:childTnLst>
-                          </p:cTn>
-                        </p:par>
-                      </p:childTnLst>
-                    </p:cTn>
-                  </p:par>
-                  <p:par>
-                    <p:cTn id="31" fill="hold">
-                      <p:stCondLst>
-                        <p:cond delay="indefinite"/>
-                      </p:stCondLst>
-                      <p:childTnLst>
-                        <p:par>
-                          <p:cTn id="32" fill="hold">
-                            <p:stCondLst>
-                              <p:cond delay="0"/>
-                            </p:stCondLst>
-                            <p:childTnLst>
-                              <p:par>
-                                <p:cTn id="33" presetID="1" presetClass="entr" presetSubtype="0" fill="hold" grpId="0" nodeType="clickEffect">
-                                  <p:stCondLst>
-                                    <p:cond delay="0"/>
-                                  </p:stCondLst>
-                                  <p:childTnLst>
-                                    <p:set>
-                                      <p:cBhvr>
-                                        <p:cTn id="34" dur="1" fill="hold">
-                                          <p:stCondLst>
-                                            <p:cond delay="0"/>
-                                          </p:stCondLst>
-                                        </p:cTn>
-                                        <p:tgtEl>
-                                          <p:spTgt spid="3">
-                                            <p:txEl>
-                                              <p:pRg st="7" end="7"/>
-                                            </p:txEl>
-                                          </p:spTgt>
-                                        </p:tgtEl>
-                                        <p:attrNameLst>
-                                          <p:attrName>style.visibility</p:attrName>
-                                        </p:attrNameLst>
-                                      </p:cBhvr>
-                                      <p:to>
-                                        <p:strVal val="visible"/>
-                                      </p:to>
-                                    </p:set>
-                                  </p:childTnLst>
-                                </p:cTn>
-                              </p:par>
-                            </p:childTnLst>
-                          </p:cTn>
-                        </p:par>
-                      </p:childTnLst>
-                    </p:cTn>
-                  </p:par>
-                  <p:par>
-                    <p:cTn id="35" fill="hold">
-                      <p:stCondLst>
-                        <p:cond delay="indefinite"/>
-                      </p:stCondLst>
-                      <p:childTnLst>
-                        <p:par>
-                          <p:cTn id="36" fill="hold">
-                            <p:stCondLst>
-                              <p:cond delay="0"/>
-                            </p:stCondLst>
-                            <p:childTnLst>
-                              <p:par>
-                                <p:cTn id="37" presetID="1" presetClass="entr" presetSubtype="0" fill="hold" nodeType="clickEffect">
-                                  <p:stCondLst>
-                                    <p:cond delay="0"/>
-                                  </p:stCondLst>
-                                  <p:childTnLst>
-                                    <p:set>
-                                      <p:cBhvr>
-                                        <p:cTn id="38" dur="1" fill="hold">
-                                          <p:stCondLst>
-                                            <p:cond delay="0"/>
-                                          </p:stCondLst>
-                                        </p:cTn>
-                                        <p:tgtEl>
-                                          <p:spTgt spid="6"/>
-                                        </p:tgtEl>
-                                        <p:attrNameLst>
-                                          <p:attrName>style.visibility</p:attrName>
-                                        </p:attrNameLst>
-                                      </p:cBhvr>
-                                      <p:to>
-                                        <p:strVal val="visible"/>
-                                      </p:to>
-                                    </p:set>
-                                  </p:childTnLst>
-                                </p:cTn>
-                              </p:par>
-                            </p:childTnLst>
-                          </p:cTn>
-                        </p:par>
-                      </p:childTnLst>
-                    </p:cTn>
-                  </p:par>
-                  <p:par>
-                    <p:cTn id="39" fill="hold">
-                      <p:stCondLst>
-                        <p:cond delay="indefinite"/>
-                      </p:stCondLst>
-                      <p:childTnLst>
-                        <p:par>
-                          <p:cTn id="40" fill="hold">
-                            <p:stCondLst>
-                              <p:cond delay="0"/>
-                            </p:stCondLst>
-                            <p:childTnLst>
-                              <p:par>
-                                <p:cTn id="41" presetID="1" presetClass="entr" presetSubtype="0" fill="hold" grpId="0" nodeType="clickEffect">
-                                  <p:stCondLst>
-                                    <p:cond delay="0"/>
-                                  </p:stCondLst>
-                                  <p:childTnLst>
-                                    <p:set>
-                                      <p:cBhvr>
-                                        <p:cTn id="42" dur="1" fill="hold">
-                                          <p:stCondLst>
-                                            <p:cond delay="0"/>
-                                          </p:stCondLst>
-                                        </p:cTn>
-                                        <p:tgtEl>
-                                          <p:spTgt spid="15"/>
-                                        </p:tgtEl>
-                                        <p:attrNameLst>
-                                          <p:attrName>style.visibility</p:attrName>
-                                        </p:attrNameLst>
-                                      </p:cBhvr>
-                                      <p:to>
-                                        <p:strVal val="visible"/>
-                                      </p:to>
-                                    </p:set>
-                                  </p:childTnLst>
-                                </p:cTn>
-                              </p:par>
-                              <p:par>
-                                <p:cTn id="43" presetID="1" presetClass="entr" presetSubtype="0" fill="hold" nodeType="withEffect">
-                                  <p:stCondLst>
-                                    <p:cond delay="0"/>
-                                  </p:stCondLst>
-                                  <p:childTnLst>
-                                    <p:set>
-                                      <p:cBhvr>
-                                        <p:cTn id="44" dur="1" fill="hold">
-                                          <p:stCondLst>
-                                            <p:cond delay="0"/>
-                                          </p:stCondLst>
-                                        </p:cTn>
-                                        <p:tgtEl>
-                                          <p:spTgt spid="9"/>
-                                        </p:tgtEl>
-                                        <p:attrNameLst>
-                                          <p:attrName>style.visibility</p:attrName>
-                                        </p:attrNameLst>
-                                      </p:cBhvr>
-                                      <p:to>
-                                        <p:strVal val="visible"/>
-                                      </p:to>
-                                    </p:set>
-                                  </p:childTnLst>
-                                </p:cTn>
-                              </p:par>
-                            </p:childTnLst>
-                          </p:cTn>
-                        </p:par>
-                      </p:childTnLst>
-                    </p:cTn>
-                  </p:par>
-                  <p:par>
-                    <p:cTn id="45" fill="hold">
-                      <p:stCondLst>
-                        <p:cond delay="indefinite"/>
-                      </p:stCondLst>
-                      <p:childTnLst>
-                        <p:par>
-                          <p:cTn id="46" fill="hold">
-                            <p:stCondLst>
-                              <p:cond delay="0"/>
-                            </p:stCondLst>
-                            <p:childTnLst>
-                              <p:par>
-                                <p:cTn id="47" presetID="1" presetClass="entr" presetSubtype="0" fill="hold" grpId="0" nodeType="clickEffect">
-                                  <p:stCondLst>
-                                    <p:cond delay="0"/>
-                                  </p:stCondLst>
-                                  <p:childTnLst>
-                                    <p:set>
-                                      <p:cBhvr>
-                                        <p:cTn id="48" dur="1" fill="hold">
-                                          <p:stCondLst>
-                                            <p:cond delay="0"/>
-                                          </p:stCondLst>
-                                        </p:cTn>
-                                        <p:tgtEl>
-                                          <p:spTgt spid="16"/>
-                                        </p:tgtEl>
-                                        <p:attrNameLst>
-                                          <p:attrName>style.visibility</p:attrName>
-                                        </p:attrNameLst>
-                                      </p:cBhvr>
-                                      <p:to>
-                                        <p:strVal val="visible"/>
-                                      </p:to>
-                                    </p:set>
-                                  </p:childTnLst>
-                                </p:cTn>
-                              </p:par>
-                              <p:par>
-                                <p:cTn id="49" presetID="1" presetClass="entr" presetSubtype="0" fill="hold" nodeType="withEffect">
-                                  <p:stCondLst>
-                                    <p:cond delay="0"/>
-                                  </p:stCondLst>
-                                  <p:childTnLst>
-                                    <p:set>
-                                      <p:cBhvr>
-                                        <p:cTn id="50" dur="1" fill="hold">
-                                          <p:stCondLst>
-                                            <p:cond delay="0"/>
-                                          </p:stCondLst>
-                                        </p:cTn>
-                                        <p:tgtEl>
-                                          <p:spTgt spid="11"/>
-                                        </p:tgtEl>
-                                        <p:attrNameLst>
-                                          <p:attrName>style.visibility</p:attrName>
-                                        </p:attrNameLst>
-                                      </p:cBhvr>
-                                      <p:to>
-                                        <p:strVal val="visible"/>
-                                      </p:to>
-                                    </p:set>
-                                  </p:childTnLst>
-                                </p:cTn>
-                              </p:par>
-                            </p:childTnLst>
-                          </p:cTn>
-                        </p:par>
-                      </p:childTnLst>
-                    </p:cTn>
-                  </p:par>
-                  <p:par>
-                    <p:cTn id="51" fill="hold">
-                      <p:stCondLst>
-                        <p:cond delay="indefinite"/>
-                      </p:stCondLst>
-                      <p:childTnLst>
-                        <p:par>
-                          <p:cTn id="52" fill="hold">
-                            <p:stCondLst>
-                              <p:cond delay="0"/>
-                            </p:stCondLst>
-                            <p:childTnLst>
-                              <p:par>
-                                <p:cTn id="53" presetID="1" presetClass="entr" presetSubtype="0" fill="hold" grpId="0" nodeType="clickEffect">
-                                  <p:stCondLst>
-                                    <p:cond delay="0"/>
-                                  </p:stCondLst>
-                                  <p:childTnLst>
-                                    <p:set>
-                                      <p:cBhvr>
-                                        <p:cTn id="54" dur="1" fill="hold">
-                                          <p:stCondLst>
-                                            <p:cond delay="0"/>
-                                          </p:stCondLst>
-                                        </p:cTn>
-                                        <p:tgtEl>
                                           <p:spTgt spid="17"/>
                                         </p:tgtEl>
                                         <p:attrNameLst>
@@ -32444,14 +32052,14 @@
                                 </p:cTn>
                               </p:par>
                               <p:par>
-                                <p:cTn id="55" presetID="1" presetClass="entr" presetSubtype="0" fill="hold" grpId="0" nodeType="withEffect">
+                                <p:cTn id="23" presetID="1" presetClass="entr" presetSubtype="0" fill="hold" grpId="0" nodeType="withEffect">
                                   <p:stCondLst>
                                     <p:cond delay="0"/>
                                   </p:stCondLst>
                                   <p:childTnLst>
                                     <p:set>
                                       <p:cBhvr>
-                                        <p:cTn id="56" dur="1" fill="hold">
+                                        <p:cTn id="24" dur="1" fill="hold">
                                           <p:stCondLst>
                                             <p:cond delay="0"/>
                                           </p:stCondLst>
@@ -32471,14 +32079,14 @@
                                 </p:cTn>
                               </p:par>
                               <p:par>
-                                <p:cTn id="57" presetID="1" presetClass="entr" presetSubtype="0" fill="hold" grpId="0" nodeType="withEffect">
+                                <p:cTn id="25" presetID="1" presetClass="entr" presetSubtype="0" fill="hold" grpId="0" nodeType="withEffect">
                                   <p:stCondLst>
                                     <p:cond delay="0"/>
                                   </p:stCondLst>
                                   <p:childTnLst>
                                     <p:set>
                                       <p:cBhvr>
-                                        <p:cTn id="58" dur="1" fill="hold">
+                                        <p:cTn id="26" dur="1" fill="hold">
                                           <p:stCondLst>
                                             <p:cond delay="0"/>
                                           </p:stCondLst>
@@ -32526,7 +32134,6 @@
     </p:tnLst>
     <p:bldLst>
       <p:bldP spid="19" grpId="0" animBg="1"/>
-      <p:bldP spid="3" grpId="0" build="p"/>
       <p:bldP spid="15" grpId="0" animBg="1"/>
       <p:bldP spid="16" grpId="0" animBg="1"/>
       <p:bldP spid="17" grpId="0" animBg="1"/>
@@ -35102,7 +34709,7 @@
           </a:ln>
           <a:extLst>
             <a:ext uri="{909E8E84-426E-40dd-AFC4-6F175D3DCCD1}">
-              <a14:hiddenFill xmlns:a14="http://schemas.microsoft.com/office/drawing/2010/main" xmlns="">
+              <a14:hiddenFill xmlns="" xmlns:a14="http://schemas.microsoft.com/office/drawing/2010/main">
                 <a:solidFill>
                   <a:srgbClr val="FFFFFF"/>
                 </a:solidFill>
@@ -35212,7 +34819,7 @@
           </a:ln>
           <a:extLst>
             <a:ext uri="{909E8E84-426E-40dd-AFC4-6F175D3DCCD1}">
-              <a14:hiddenFill xmlns:a14="http://schemas.microsoft.com/office/drawing/2010/main" xmlns="">
+              <a14:hiddenFill xmlns="" xmlns:a14="http://schemas.microsoft.com/office/drawing/2010/main">
                 <a:solidFill>
                   <a:srgbClr val="FFFFFF"/>
                 </a:solidFill>
@@ -35250,14 +34857,14 @@
           </a:ln>
           <a:extLst>
             <a:ext uri="{909E8E84-426E-40dd-AFC4-6F175D3DCCD1}">
-              <a14:hiddenFill xmlns:a14="http://schemas.microsoft.com/office/drawing/2010/main" xmlns="">
+              <a14:hiddenFill xmlns="" xmlns:a14="http://schemas.microsoft.com/office/drawing/2010/main">
                 <a:solidFill>
                   <a:srgbClr val="FFFFFF"/>
                 </a:solidFill>
               </a14:hiddenFill>
             </a:ext>
             <a:ext uri="{91240B29-F687-4f45-9708-019B960494DF}">
-              <a14:hiddenLine xmlns:a14="http://schemas.microsoft.com/office/drawing/2010/main" xmlns="" w="9525">
+              <a14:hiddenLine xmlns="" xmlns:a14="http://schemas.microsoft.com/office/drawing/2010/main" w="9525">
                 <a:solidFill>
                   <a:srgbClr val="000000"/>
                 </a:solidFill>
@@ -35413,14 +35020,14 @@
           </a:ln>
           <a:extLst>
             <a:ext uri="{909E8E84-426E-40dd-AFC4-6F175D3DCCD1}">
-              <a14:hiddenFill xmlns:a14="http://schemas.microsoft.com/office/drawing/2010/main" xmlns="">
+              <a14:hiddenFill xmlns="" xmlns:a14="http://schemas.microsoft.com/office/drawing/2010/main">
                 <a:solidFill>
                   <a:srgbClr val="FFFFFF"/>
                 </a:solidFill>
               </a14:hiddenFill>
             </a:ext>
             <a:ext uri="{91240B29-F687-4f45-9708-019B960494DF}">
-              <a14:hiddenLine xmlns:a14="http://schemas.microsoft.com/office/drawing/2010/main" xmlns="" w="9525">
+              <a14:hiddenLine xmlns="" xmlns:a14="http://schemas.microsoft.com/office/drawing/2010/main" w="9525">
                 <a:solidFill>
                   <a:srgbClr val="000000"/>
                 </a:solidFill>
@@ -35576,14 +35183,14 @@
           </a:ln>
           <a:extLst>
             <a:ext uri="{909E8E84-426E-40dd-AFC4-6F175D3DCCD1}">
-              <a14:hiddenFill xmlns:a14="http://schemas.microsoft.com/office/drawing/2010/main" xmlns="">
+              <a14:hiddenFill xmlns="" xmlns:a14="http://schemas.microsoft.com/office/drawing/2010/main">
                 <a:solidFill>
                   <a:srgbClr val="FFFFFF"/>
                 </a:solidFill>
               </a14:hiddenFill>
             </a:ext>
             <a:ext uri="{91240B29-F687-4f45-9708-019B960494DF}">
-              <a14:hiddenLine xmlns:a14="http://schemas.microsoft.com/office/drawing/2010/main" xmlns="" w="9525">
+              <a14:hiddenLine xmlns="" xmlns:a14="http://schemas.microsoft.com/office/drawing/2010/main" w="9525">
                 <a:solidFill>
                   <a:srgbClr val="000000"/>
                 </a:solidFill>
@@ -35812,7 +35419,7 @@
           </a:ln>
           <a:extLst>
             <a:ext uri="{909E8E84-426E-40dd-AFC4-6F175D3DCCD1}">
-              <a14:hiddenFill xmlns:a14="http://schemas.microsoft.com/office/drawing/2010/main" xmlns="">
+              <a14:hiddenFill xmlns="" xmlns:a14="http://schemas.microsoft.com/office/drawing/2010/main">
                 <a:solidFill>
                   <a:srgbClr val="FFFFFF"/>
                 </a:solidFill>
@@ -35855,7 +35462,7 @@
           </a:ln>
           <a:extLst>
             <a:ext uri="{909E8E84-426E-40dd-AFC4-6F175D3DCCD1}">
-              <a14:hiddenFill xmlns:a14="http://schemas.microsoft.com/office/drawing/2010/main" xmlns="">
+              <a14:hiddenFill xmlns="" xmlns:a14="http://schemas.microsoft.com/office/drawing/2010/main">
                 <a:noFill/>
               </a14:hiddenFill>
             </a:ext>
@@ -35979,7 +35586,7 @@
             </a:ln>
             <a:extLst>
               <a:ext uri="{909E8E84-426E-40dd-AFC4-6F175D3DCCD1}">
-                <a14:hiddenFill xmlns:a14="http://schemas.microsoft.com/office/drawing/2010/main" xmlns="">
+                <a14:hiddenFill xmlns="" xmlns:a14="http://schemas.microsoft.com/office/drawing/2010/main">
                   <a:solidFill>
                     <a:srgbClr val="FFFFFF"/>
                   </a:solidFill>
@@ -36158,7 +35765,7 @@
             </a:ln>
             <a:extLst>
               <a:ext uri="{909E8E84-426E-40dd-AFC4-6F175D3DCCD1}">
-                <a14:hiddenFill xmlns:a14="http://schemas.microsoft.com/office/drawing/2010/main" xmlns="">
+                <a14:hiddenFill xmlns="" xmlns:a14="http://schemas.microsoft.com/office/drawing/2010/main">
                   <a:solidFill>
                     <a:srgbClr val="FFFFFF"/>
                   </a:solidFill>
@@ -36201,7 +35808,7 @@
             </a:ln>
             <a:extLst>
               <a:ext uri="{909E8E84-426E-40dd-AFC4-6F175D3DCCD1}">
-                <a14:hiddenFill xmlns:a14="http://schemas.microsoft.com/office/drawing/2010/main" xmlns="">
+                <a14:hiddenFill xmlns="" xmlns:a14="http://schemas.microsoft.com/office/drawing/2010/main">
                   <a:noFill/>
                 </a14:hiddenFill>
               </a:ext>
@@ -36242,7 +35849,7 @@
             </a:ln>
             <a:extLst>
               <a:ext uri="{909E8E84-426E-40dd-AFC4-6F175D3DCCD1}">
-                <a14:hiddenFill xmlns:a14="http://schemas.microsoft.com/office/drawing/2010/main" xmlns="">
+                <a14:hiddenFill xmlns="" xmlns:a14="http://schemas.microsoft.com/office/drawing/2010/main">
                   <a:noFill/>
                 </a14:hiddenFill>
               </a:ext>
@@ -36300,7 +35907,7 @@
             </a:ln>
             <a:extLst>
               <a:ext uri="{909E8E84-426E-40dd-AFC4-6F175D3DCCD1}">
-                <a14:hiddenFill xmlns:a14="http://schemas.microsoft.com/office/drawing/2010/main" xmlns="">
+                <a14:hiddenFill xmlns="" xmlns:a14="http://schemas.microsoft.com/office/drawing/2010/main">
                   <a:noFill/>
                 </a14:hiddenFill>
               </a:ext>
@@ -36336,14 +35943,14 @@
             </a:ln>
             <a:extLst>
               <a:ext uri="{909E8E84-426E-40dd-AFC4-6F175D3DCCD1}">
-                <a14:hiddenFill xmlns:a14="http://schemas.microsoft.com/office/drawing/2010/main" xmlns="">
+                <a14:hiddenFill xmlns="" xmlns:a14="http://schemas.microsoft.com/office/drawing/2010/main">
                   <a:solidFill>
                     <a:srgbClr val="FFFFFF"/>
                   </a:solidFill>
                 </a14:hiddenFill>
               </a:ext>
               <a:ext uri="{91240B29-F687-4f45-9708-019B960494DF}">
-                <a14:hiddenLine xmlns:a14="http://schemas.microsoft.com/office/drawing/2010/main" xmlns="" w="38100">
+                <a14:hiddenLine xmlns="" xmlns:a14="http://schemas.microsoft.com/office/drawing/2010/main" w="38100">
                   <a:solidFill>
                     <a:srgbClr val="000000"/>
                   </a:solidFill>
@@ -36504,7 +36111,7 @@
             </a:ln>
             <a:extLst>
               <a:ext uri="{909E8E84-426E-40dd-AFC4-6F175D3DCCD1}">
-                <a14:hiddenFill xmlns:a14="http://schemas.microsoft.com/office/drawing/2010/main" xmlns="">
+                <a14:hiddenFill xmlns="" xmlns:a14="http://schemas.microsoft.com/office/drawing/2010/main">
                   <a:noFill/>
                 </a14:hiddenFill>
               </a:ext>
@@ -36557,14 +36164,14 @@
             </a:ln>
             <a:extLst>
               <a:ext uri="{909E8E84-426E-40dd-AFC4-6F175D3DCCD1}">
-                <a14:hiddenFill xmlns:a14="http://schemas.microsoft.com/office/drawing/2010/main" xmlns="">
+                <a14:hiddenFill xmlns="" xmlns:a14="http://schemas.microsoft.com/office/drawing/2010/main">
                   <a:solidFill>
                     <a:srgbClr val="FFFFFF"/>
                   </a:solidFill>
                 </a14:hiddenFill>
               </a:ext>
               <a:ext uri="{91240B29-F687-4f45-9708-019B960494DF}">
-                <a14:hiddenLine xmlns:a14="http://schemas.microsoft.com/office/drawing/2010/main" xmlns="" w="38100">
+                <a14:hiddenLine xmlns="" xmlns:a14="http://schemas.microsoft.com/office/drawing/2010/main" w="38100">
                   <a:solidFill>
                     <a:srgbClr val="000000"/>
                   </a:solidFill>
@@ -36727,7 +36334,7 @@
             </a:ln>
             <a:extLst>
               <a:ext uri="{909E8E84-426E-40dd-AFC4-6F175D3DCCD1}">
-                <a14:hiddenFill xmlns:a14="http://schemas.microsoft.com/office/drawing/2010/main" xmlns="">
+                <a14:hiddenFill xmlns="" xmlns:a14="http://schemas.microsoft.com/office/drawing/2010/main">
                   <a:noFill/>
                 </a14:hiddenFill>
               </a:ext>
@@ -36763,7 +36370,7 @@
             </a:ln>
             <a:extLst>
               <a:ext uri="{909E8E84-426E-40dd-AFC4-6F175D3DCCD1}">
-                <a14:hiddenFill xmlns:a14="http://schemas.microsoft.com/office/drawing/2010/main" xmlns="">
+                <a14:hiddenFill xmlns="" xmlns:a14="http://schemas.microsoft.com/office/drawing/2010/main">
                   <a:noFill/>
                 </a14:hiddenFill>
               </a:ext>
@@ -36814,7 +36421,7 @@
             </a:ln>
             <a:extLst>
               <a:ext uri="{909E8E84-426E-40dd-AFC4-6F175D3DCCD1}">
-                <a14:hiddenFill xmlns:a14="http://schemas.microsoft.com/office/drawing/2010/main" xmlns="">
+                <a14:hiddenFill xmlns="" xmlns:a14="http://schemas.microsoft.com/office/drawing/2010/main">
                   <a:noFill/>
                 </a14:hiddenFill>
               </a:ext>
@@ -36850,14 +36457,14 @@
             </a:ln>
             <a:extLst>
               <a:ext uri="{909E8E84-426E-40dd-AFC4-6F175D3DCCD1}">
-                <a14:hiddenFill xmlns:a14="http://schemas.microsoft.com/office/drawing/2010/main" xmlns="">
+                <a14:hiddenFill xmlns="" xmlns:a14="http://schemas.microsoft.com/office/drawing/2010/main">
                   <a:solidFill>
                     <a:srgbClr val="FFFFFF"/>
                   </a:solidFill>
                 </a14:hiddenFill>
               </a:ext>
               <a:ext uri="{91240B29-F687-4f45-9708-019B960494DF}">
-                <a14:hiddenLine xmlns:a14="http://schemas.microsoft.com/office/drawing/2010/main" xmlns="" w="38100">
+                <a14:hiddenLine xmlns="" xmlns:a14="http://schemas.microsoft.com/office/drawing/2010/main" w="38100">
                   <a:solidFill>
                     <a:srgbClr val="000000"/>
                   </a:solidFill>
